--- a/.ppt_build/body_ai.pptx
+++ b/.ppt_build/body_ai.pptx
@@ -2,14 +2,14 @@
 <file path=ppt/presentation.xml><?xml version="1.0" encoding="utf-8"?>
 <p:presentation xmlns:p="http://schemas.openxmlformats.org/presentationml/2006/main">
   <p:sldMasterIdLst>
-    <p:sldMasterId xmlns:r="http://schemas.openxmlformats.org/officeDocument/2006/relationships" id="2147483648" r:id="R5cdef4d5147d4a8b"/>
+    <p:sldMasterId xmlns:r="http://schemas.openxmlformats.org/officeDocument/2006/relationships" id="2147483648" r:id="R0a95a69184f14878"/>
   </p:sldMasterIdLst>
   <p:notesMasterIdLst>
-    <p:notesMasterId xmlns:r="http://schemas.openxmlformats.org/officeDocument/2006/relationships" r:id="Rfad6a983cd9a45a9"/>
+    <p:notesMasterId xmlns:r="http://schemas.openxmlformats.org/officeDocument/2006/relationships" r:id="R6bd32524036c4457"/>
   </p:notesMasterIdLst>
   <p:sldIdLst>
-    <p:sldId xmlns:r="http://schemas.openxmlformats.org/officeDocument/2006/relationships" id="256" r:id="R3d999e4d0c264db1"/>
-    <p:sldId xmlns:r="http://schemas.openxmlformats.org/officeDocument/2006/relationships" id="257" r:id="Refb07789f709457a"/>
+    <p:sldId xmlns:r="http://schemas.openxmlformats.org/officeDocument/2006/relationships" id="256" r:id="R55a74708cfb64bfc"/>
+    <p:sldId xmlns:r="http://schemas.openxmlformats.org/officeDocument/2006/relationships" id="257" r:id="R43d67307a81249c0"/>
   </p:sldIdLst>
   <p:sldSz cx="12192000" cy="6858000"/>
   <p:notesSz cx="6858000" cy="9144000"/>
@@ -552,7 +552,7 @@
           <p:cNvPr id="3" name="Title">
             <a:extLst xmlns:a="http://schemas.openxmlformats.org/drawingml/2006/main">
               <a:ext uri="{FF2B5EF4-FFF2-40B4-BE49-F238E27FC236}">
-                <a16:creationId xmlns:a16="http://schemas.microsoft.com/office/drawing/2014/main" id="{BE72D33E-85AD-4487-B40A-4306848E5D0F}"/>
+                <a16:creationId xmlns:a16="http://schemas.microsoft.com/office/drawing/2014/main" id="{F67B5CEF-853B-472D-884A-2B189284C112}"/>
               </a:ext>
             </a:extLst>
           </p:cNvPr>
@@ -781,7 +781,7 @@
           <p:cNvPr id="2" name="Subtitle">
             <a:extLst xmlns:a="http://schemas.openxmlformats.org/drawingml/2006/main">
               <a:ext uri="{FF2B5EF4-FFF2-40B4-BE49-F238E27FC236}">
-                <a16:creationId xmlns:a16="http://schemas.microsoft.com/office/drawing/2014/main" id="{545A344C-9596-4F77-87EE-610C38EE650F}"/>
+                <a16:creationId xmlns:a16="http://schemas.microsoft.com/office/drawing/2014/main" id="{9D5BFE06-3F2D-47B6-83E8-48A2ED0AD877}"/>
               </a:ext>
             </a:extLst>
           </p:cNvPr>
@@ -1027,7 +1027,7 @@
           <p:cNvPr id="2" name="Section title">
             <a:extLst xmlns:a="http://schemas.openxmlformats.org/drawingml/2006/main">
               <a:ext uri="{FF2B5EF4-FFF2-40B4-BE49-F238E27FC236}">
-                <a16:creationId xmlns:a16="http://schemas.microsoft.com/office/drawing/2014/main" id="{B4871BCB-C3AE-475C-842B-89FF5FFB2FB0}"/>
+                <a16:creationId xmlns:a16="http://schemas.microsoft.com/office/drawing/2014/main" id="{F94BB352-05D1-4479-9319-0BF00675FB55}"/>
               </a:ext>
             </a:extLst>
           </p:cNvPr>
@@ -1273,7 +1273,7 @@
           <p:cNvPr id="3" name="Title">
             <a:extLst xmlns:a="http://schemas.openxmlformats.org/drawingml/2006/main">
               <a:ext uri="{FF2B5EF4-FFF2-40B4-BE49-F238E27FC236}">
-                <a16:creationId xmlns:a16="http://schemas.microsoft.com/office/drawing/2014/main" id="{2C70119E-2EE6-4994-BA82-65633F897667}"/>
+                <a16:creationId xmlns:a16="http://schemas.microsoft.com/office/drawing/2014/main" id="{930118F5-EF04-4D91-8893-D50617608AF3}"/>
               </a:ext>
             </a:extLst>
           </p:cNvPr>
@@ -1502,7 +1502,7 @@
           <p:cNvPr id="2" name="Body">
             <a:extLst xmlns:a="http://schemas.openxmlformats.org/drawingml/2006/main">
               <a:ext uri="{FF2B5EF4-FFF2-40B4-BE49-F238E27FC236}">
-                <a16:creationId xmlns:a16="http://schemas.microsoft.com/office/drawing/2014/main" id="{877B94B3-D56E-4F29-99AF-11F6764E44A4}"/>
+                <a16:creationId xmlns:a16="http://schemas.microsoft.com/office/drawing/2014/main" id="{110622DA-C8F9-4D65-A98D-E0A12504F71F}"/>
               </a:ext>
             </a:extLst>
           </p:cNvPr>
@@ -1748,7 +1748,7 @@
           <p:cNvPr id="4" name="Title">
             <a:extLst xmlns:a="http://schemas.openxmlformats.org/drawingml/2006/main">
               <a:ext uri="{FF2B5EF4-FFF2-40B4-BE49-F238E27FC236}">
-                <a16:creationId xmlns:a16="http://schemas.microsoft.com/office/drawing/2014/main" id="{E0BE10B8-97F5-45CB-B7E4-5185CADD5A26}"/>
+                <a16:creationId xmlns:a16="http://schemas.microsoft.com/office/drawing/2014/main" id="{4D9B289C-8415-48E9-A062-716C8F53D361}"/>
               </a:ext>
             </a:extLst>
           </p:cNvPr>
@@ -1977,7 +1977,7 @@
           <p:cNvPr id="2" name="Left column">
             <a:extLst xmlns:a="http://schemas.openxmlformats.org/drawingml/2006/main">
               <a:ext uri="{FF2B5EF4-FFF2-40B4-BE49-F238E27FC236}">
-                <a16:creationId xmlns:a16="http://schemas.microsoft.com/office/drawing/2014/main" id="{0B935603-D08E-41F2-84E9-24BCC501AA73}"/>
+                <a16:creationId xmlns:a16="http://schemas.microsoft.com/office/drawing/2014/main" id="{C7AE5369-A286-482F-96DC-3211F689593A}"/>
               </a:ext>
             </a:extLst>
           </p:cNvPr>
@@ -2206,7 +2206,7 @@
           <p:cNvPr id="3" name="Right column">
             <a:extLst xmlns:a="http://schemas.openxmlformats.org/drawingml/2006/main">
               <a:ext uri="{FF2B5EF4-FFF2-40B4-BE49-F238E27FC236}">
-                <a16:creationId xmlns:a16="http://schemas.microsoft.com/office/drawing/2014/main" id="{D5E8F210-51AC-4DB2-95FE-3C7F919A54D3}"/>
+                <a16:creationId xmlns:a16="http://schemas.microsoft.com/office/drawing/2014/main" id="{A0AD264B-9D41-44DD-AFC5-55E285E26533}"/>
               </a:ext>
             </a:extLst>
           </p:cNvPr>
@@ -2452,7 +2452,7 @@
           <p:cNvPr id="3" name="Title">
             <a:extLst xmlns:a="http://schemas.openxmlformats.org/drawingml/2006/main">
               <a:ext uri="{FF2B5EF4-FFF2-40B4-BE49-F238E27FC236}">
-                <a16:creationId xmlns:a16="http://schemas.microsoft.com/office/drawing/2014/main" id="{C69EFF8E-8E8D-4E89-A455-CD1225B1768E}"/>
+                <a16:creationId xmlns:a16="http://schemas.microsoft.com/office/drawing/2014/main" id="{C75A053E-9A45-487B-B362-EE74CEDAA0D8}"/>
               </a:ext>
             </a:extLst>
           </p:cNvPr>
@@ -2681,7 +2681,7 @@
           <p:cNvPr id="2" name="Left column">
             <a:extLst xmlns:a="http://schemas.openxmlformats.org/drawingml/2006/main">
               <a:ext uri="{FF2B5EF4-FFF2-40B4-BE49-F238E27FC236}">
-                <a16:creationId xmlns:a16="http://schemas.microsoft.com/office/drawing/2014/main" id="{358A52F1-DAFC-478E-B6F5-6578C6EB77D3}"/>
+                <a16:creationId xmlns:a16="http://schemas.microsoft.com/office/drawing/2014/main" id="{722CB5D4-D92E-4D27-8E99-F775C391480F}"/>
               </a:ext>
             </a:extLst>
           </p:cNvPr>
@@ -2948,12 +2948,12 @@
   </p:cSld>
   <p:clrMap bg1="lt1" tx1="dk1" bg2="lt2" tx2="dk2" accent1="accent1" accent2="accent2" accent3="accent3" accent4="accent4" accent5="accent5" accent6="accent6" hlink="hlink" folHlink="folHlink"/>
   <p:sldLayoutIdLst>
-    <p:sldLayoutId xmlns:r="http://schemas.openxmlformats.org/officeDocument/2006/relationships" id="2147483649" r:id="Rab71ae7c972b499f"/>
-    <p:sldLayoutId xmlns:r="http://schemas.openxmlformats.org/officeDocument/2006/relationships" id="2147483650" r:id="R1988dbf9b148447b"/>
-    <p:sldLayoutId xmlns:r="http://schemas.openxmlformats.org/officeDocument/2006/relationships" id="2147483651" r:id="Rae058dcd7df74385"/>
-    <p:sldLayoutId xmlns:r="http://schemas.openxmlformats.org/officeDocument/2006/relationships" id="2147483652" r:id="R2e044c2b260e414e"/>
-    <p:sldLayoutId xmlns:r="http://schemas.openxmlformats.org/officeDocument/2006/relationships" id="2147483653" r:id="R0720943400c541e8"/>
-    <p:sldLayoutId xmlns:r="http://schemas.openxmlformats.org/officeDocument/2006/relationships" id="2147483654" r:id="Rec228319cec24b9c"/>
+    <p:sldLayoutId xmlns:r="http://schemas.openxmlformats.org/officeDocument/2006/relationships" id="2147483649" r:id="R989a37ef8d6a45e6"/>
+    <p:sldLayoutId xmlns:r="http://schemas.openxmlformats.org/officeDocument/2006/relationships" id="2147483650" r:id="Rbdb559ffedd64723"/>
+    <p:sldLayoutId xmlns:r="http://schemas.openxmlformats.org/officeDocument/2006/relationships" id="2147483651" r:id="R17ecfeccc3324b38"/>
+    <p:sldLayoutId xmlns:r="http://schemas.openxmlformats.org/officeDocument/2006/relationships" id="2147483652" r:id="Rae42844f8b834396"/>
+    <p:sldLayoutId xmlns:r="http://schemas.openxmlformats.org/officeDocument/2006/relationships" id="2147483653" r:id="R342ab5bc31824b2a"/>
+    <p:sldLayoutId xmlns:r="http://schemas.openxmlformats.org/officeDocument/2006/relationships" id="2147483654" r:id="R0f3457fa3632483d"/>
   </p:sldLayoutIdLst>
   <p:txStyles>
     <p:titleStyle>
@@ -3497,7 +3497,7 @@
           <p:cNvPr id="10" name="">
             <a:extLst xmlns:a="http://schemas.openxmlformats.org/drawingml/2006/main">
               <a:ext uri="{FF2B5EF4-FFF2-40B4-BE49-F238E27FC236}">
-                <a16:creationId xmlns:a16="http://schemas.microsoft.com/office/drawing/2014/main" id="{29B70C0F-1C35-49BC-AEBA-8A60DF48F66B}"/>
+                <a16:creationId xmlns:a16="http://schemas.microsoft.com/office/drawing/2014/main" id="{3794D0F8-D8D0-47C0-BA0F-ABE1AD5CDFAC}"/>
               </a:ext>
             </a:extLst>
           </p:cNvPr>
@@ -3609,7 +3609,7 @@
                   <a:srgbClr val="000000"/>
                 </a:solidFill>
               </a:rPr>
-              <a:t>AI风格感知：检验PRIME思路的适用性</a:t>
+              <a:t>AI风格感知：条件输入与状态门控</a:t>
             </a:r>
           </a:p>
         </p:txBody>
@@ -3619,7 +3619,7 @@
           <p:cNvPr id="2" name="">
             <a:extLst xmlns:a="http://schemas.openxmlformats.org/drawingml/2006/main">
               <a:ext uri="{FF2B5EF4-FFF2-40B4-BE49-F238E27FC236}">
-                <a16:creationId xmlns:a16="http://schemas.microsoft.com/office/drawing/2014/main" id="{6045902A-E012-4E4F-BEA2-249F5CFF1D3D}"/>
+                <a16:creationId xmlns:a16="http://schemas.microsoft.com/office/drawing/2014/main" id="{AF310D98-28E5-4E3F-B650-23220C60AA5E}"/>
               </a:ext>
             </a:extLst>
           </p:cNvPr>
@@ -3731,7 +3731,7 @@
                   <a:srgbClr val="000000"/>
                 </a:solidFill>
               </a:rPr>
-              <a:t>Q1整理宏观与风格指标，结合各类因子，为现有时序模型补充市场状态输入。</a:t>
+              <a:t>Q1统一L2、预期及成长因子的生效时点，构建大小盘、成长价值与风险状态样本。</a:t>
             </a:r>
           </a:p>
         </p:txBody>
@@ -3741,7 +3741,7 @@
           <p:cNvPr id="3" name="">
             <a:extLst xmlns:a="http://schemas.openxmlformats.org/drawingml/2006/main">
               <a:ext uri="{FF2B5EF4-FFF2-40B4-BE49-F238E27FC236}">
-                <a16:creationId xmlns:a16="http://schemas.microsoft.com/office/drawing/2014/main" id="{C3656440-EBD4-4625-B22E-8C1294D4B3AA}"/>
+                <a16:creationId xmlns:a16="http://schemas.microsoft.com/office/drawing/2014/main" id="{0CC9E399-5E9A-4E29-9494-45EB32254B19}"/>
               </a:ext>
             </a:extLst>
           </p:cNvPr>
@@ -3853,7 +3853,7 @@
                   <a:srgbClr val="000000"/>
                 </a:solidFill>
               </a:rPr>
-              <a:t>Q2比较有无风格感知的模型，检查不同市场阶段的因子权重与样本外表现。</a:t>
+              <a:t>Q2借鉴PRIME加入状态输入与门控，对比无状态GRU和分位规则，检验未来因子收益。</a:t>
             </a:r>
           </a:p>
         </p:txBody>
@@ -3863,7 +3863,7 @@
           <p:cNvPr id="4" name="">
             <a:extLst xmlns:a="http://schemas.openxmlformats.org/drawingml/2006/main">
               <a:ext uri="{FF2B5EF4-FFF2-40B4-BE49-F238E27FC236}">
-                <a16:creationId xmlns:a16="http://schemas.microsoft.com/office/drawing/2014/main" id="{111FEE66-7DD4-46FB-B93B-3E802C7590E5}"/>
+                <a16:creationId xmlns:a16="http://schemas.microsoft.com/office/drawing/2014/main" id="{A096349B-20FF-4D85-8D40-38A248BF1452}"/>
               </a:ext>
             </a:extLst>
           </p:cNvPr>
@@ -3985,7 +3985,7 @@
           <p:cNvPr id="5" name="">
             <a:extLst xmlns:a="http://schemas.openxmlformats.org/drawingml/2006/main">
               <a:ext uri="{FF2B5EF4-FFF2-40B4-BE49-F238E27FC236}">
-                <a16:creationId xmlns:a16="http://schemas.microsoft.com/office/drawing/2014/main" id="{B5412126-4E74-4B45-AD70-1A73620E449D}"/>
+                <a16:creationId xmlns:a16="http://schemas.microsoft.com/office/drawing/2014/main" id="{C607D88A-FCD4-481B-8CB9-CEEC3859D195}"/>
               </a:ext>
             </a:extLst>
           </p:cNvPr>
@@ -4097,7 +4097,7 @@
                   <a:srgbClr val="000000"/>
                 </a:solidFill>
               </a:rPr>
-              <a:t>设置1、3、5日收益预测头，先以等权损失训练，与单一5日标签模型对比。</a:t>
+              <a:t>设置1、3、5日预测头，各自拟合真实收益，以等权损失训练，对比单一5日标签。</a:t>
             </a:r>
           </a:p>
         </p:txBody>
@@ -4107,7 +4107,7 @@
           <p:cNvPr id="6" name="">
             <a:extLst xmlns:a="http://schemas.openxmlformats.org/drawingml/2006/main">
               <a:ext uri="{FF2B5EF4-FFF2-40B4-BE49-F238E27FC236}">
-                <a16:creationId xmlns:a16="http://schemas.microsoft.com/office/drawing/2014/main" id="{5A80E523-DD5E-4382-AB4D-2F2636687D4E}"/>
+                <a16:creationId xmlns:a16="http://schemas.microsoft.com/office/drawing/2014/main" id="{F0C6DDBF-3CD4-4FB9-8095-9DA34E5719DB}"/>
               </a:ext>
             </a:extLst>
           </p:cNvPr>
@@ -4219,7 +4219,7 @@
                   <a:srgbClr val="000000"/>
                 </a:solidFill>
               </a:rPr>
-              <a:t>5日RankIC与成本后收益改善后，再研究自适应标签权重，另留独立样本检验。</a:t>
+              <a:t>先检验5日RankIC与成本后收益，优于单任务后再试自适应权重，独立样本留作终检。</a:t>
             </a:r>
           </a:p>
         </p:txBody>
@@ -4229,7 +4229,7 @@
           <p:cNvPr id="7" name="">
             <a:extLst xmlns:a="http://schemas.openxmlformats.org/drawingml/2006/main">
               <a:ext uri="{FF2B5EF4-FFF2-40B4-BE49-F238E27FC236}">
-                <a16:creationId xmlns:a16="http://schemas.microsoft.com/office/drawing/2014/main" id="{E96A82A6-8BA4-42D8-9A81-F0F4D7E8BC30}"/>
+                <a16:creationId xmlns:a16="http://schemas.microsoft.com/office/drawing/2014/main" id="{268859E4-AF02-48E7-AF9E-083ABEEF585D}"/>
               </a:ext>
             </a:extLst>
           </p:cNvPr>
@@ -4341,7 +4341,7 @@
                   <a:srgbClr val="000000"/>
                 </a:solidFill>
               </a:rPr>
-              <a:t>模型验证：固定基线，保留实验依据</a:t>
+              <a:t>滚动验证：识别模型的真实增量</a:t>
             </a:r>
           </a:p>
         </p:txBody>
@@ -4351,7 +4351,7 @@
           <p:cNvPr id="8" name="">
             <a:extLst xmlns:a="http://schemas.openxmlformats.org/drawingml/2006/main">
               <a:ext uri="{FF2B5EF4-FFF2-40B4-BE49-F238E27FC236}">
-                <a16:creationId xmlns:a16="http://schemas.microsoft.com/office/drawing/2014/main" id="{EAEFF544-92A4-4C59-B505-F26925CF5C36}"/>
+                <a16:creationId xmlns:a16="http://schemas.microsoft.com/office/drawing/2014/main" id="{B66B74FC-5E7A-49BC-B8E1-8CEEC02EB793}"/>
               </a:ext>
             </a:extLst>
           </p:cNvPr>
@@ -4463,7 +4463,7 @@
                   <a:srgbClr val="000000"/>
                 </a:solidFill>
               </a:rPr>
-              <a:t>统一股票池、回测口径和数据切分。训练与验证按标签期限隔离，保留多数据源对照实验。</a:t>
+              <a:t>Q3分别检验状态门控与多任务的贡献，比较分域RankIC、分组单调性及成本后超额。</a:t>
             </a:r>
           </a:p>
         </p:txBody>
@@ -4473,7 +4473,7 @@
           <p:cNvPr id="9" name="">
             <a:extLst xmlns:a="http://schemas.openxmlformats.org/drawingml/2006/main">
               <a:ext uri="{FF2B5EF4-FFF2-40B4-BE49-F238E27FC236}">
-                <a16:creationId xmlns:a16="http://schemas.microsoft.com/office/drawing/2014/main" id="{2CC83A11-1979-414D-9D80-8E1A35CEF473}"/>
+                <a16:creationId xmlns:a16="http://schemas.microsoft.com/office/drawing/2014/main" id="{85EEC743-583E-4399-9E9B-146C7E1D39BC}"/>
               </a:ext>
             </a:extLst>
           </p:cNvPr>
@@ -4585,7 +4585,7 @@
                   <a:srgbClr val="000000"/>
                 </a:solidFill>
               </a:rPr>
-              <a:t>Q3至Q4交付AI模型对照报告与实验配置，说明增益来源、适用场景及失效条件。</a:t>
+              <a:t>Q4跟踪通过检验的模拟盘，归档数据口径、模型配置与失效条件，训练验证按标签期隔离。</a:t>
             </a:r>
           </a:p>
         </p:txBody>
@@ -4593,7 +4593,7 @@
     </p:spTree>
     <p:extLst>
       <p:ext uri="{BB962C8B-B14F-4D97-AF65-F5344CB8AC3E}">
-        <p14:creationId xmlns:p14="http://schemas.microsoft.com/office/powerpoint/2010/main" val="1363473873"/>
+        <p14:creationId xmlns:p14="http://schemas.microsoft.com/office/powerpoint/2010/main" val="558006833"/>
       </p:ext>
     </p:extLst>
   </p:cSld>
@@ -4617,7 +4617,7 @@
           <p:cNvPr id="9" name="">
             <a:extLst xmlns:a="http://schemas.openxmlformats.org/drawingml/2006/main">
               <a:ext uri="{FF2B5EF4-FFF2-40B4-BE49-F238E27FC236}">
-                <a16:creationId xmlns:a16="http://schemas.microsoft.com/office/drawing/2014/main" id="{85801430-C754-413C-ABF8-5CC740E222D9}"/>
+                <a16:creationId xmlns:a16="http://schemas.microsoft.com/office/drawing/2014/main" id="{2A6865F5-F259-473A-B106-F89323A7402D}"/>
               </a:ext>
             </a:extLst>
           </p:cNvPr>
@@ -4727,7 +4727,7 @@
                   <a:srgbClr val="000000"/>
                 </a:solidFill>
               </a:rPr>
-              <a:t>微观结构</a:t>
+              <a:t>L2增强指增</a:t>
             </a:r>
           </a:p>
           <a:p xmlns:a="http://schemas.openxmlformats.org/drawingml/2006/main">
@@ -4744,7 +4744,7 @@
                   <a:srgbClr val="000000"/>
                 </a:solidFill>
               </a:rPr>
-              <a:t>与预期因子</a:t>
+              <a:t>特征构造</a:t>
             </a:r>
           </a:p>
         </p:txBody>
@@ -4754,7 +4754,7 @@
           <p:cNvPr id="2" name="">
             <a:extLst xmlns:a="http://schemas.openxmlformats.org/drawingml/2006/main">
               <a:ext uri="{FF2B5EF4-FFF2-40B4-BE49-F238E27FC236}">
-                <a16:creationId xmlns:a16="http://schemas.microsoft.com/office/drawing/2014/main" id="{73B7184C-F582-4D9F-9156-0DF6CA1880AA}"/>
+                <a16:creationId xmlns:a16="http://schemas.microsoft.com/office/drawing/2014/main" id="{1C4F2365-D76F-4156-B047-E53B77E47E62}"/>
               </a:ext>
             </a:extLst>
           </p:cNvPr>
@@ -4864,7 +4864,7 @@
                   <a:srgbClr val="000000"/>
                 </a:solidFill>
               </a:rPr>
-              <a:t>Q1至Q2积累Level2、成长及一致预期因子，统一清洗与检验。</a:t>
+              <a:t>Q1按时段、订单规模及主动方向拆分委托与成交样本。</a:t>
             </a:r>
           </a:p>
           <a:p xmlns:a="http://schemas.openxmlformats.org/drawingml/2006/main">
@@ -4881,7 +4881,7 @@
                   <a:srgbClr val="000000"/>
                 </a:solidFill>
               </a:rPr>
-              <a:t>以机器学习比较新增因子的预测贡献，剔除冗余信号。</a:t>
+              <a:t>提取订单流不平衡、交易聚集和冲击后流动性恢复，补充成长与预期因子。</a:t>
             </a:r>
           </a:p>
         </p:txBody>
@@ -4891,7 +4891,7 @@
           <p:cNvPr id="3" name="">
             <a:extLst xmlns:a="http://schemas.openxmlformats.org/drawingml/2006/main">
               <a:ext uri="{FF2B5EF4-FFF2-40B4-BE49-F238E27FC236}">
-                <a16:creationId xmlns:a16="http://schemas.microsoft.com/office/drawing/2014/main" id="{1A77E28A-DD74-4ED8-8CDA-681B2025DBA0}"/>
+                <a16:creationId xmlns:a16="http://schemas.microsoft.com/office/drawing/2014/main" id="{F7CF10E7-E648-4AE7-9C92-C9B972C16B30}"/>
               </a:ext>
             </a:extLst>
           </p:cNvPr>
@@ -5001,7 +5001,7 @@
                   <a:srgbClr val="000000"/>
                 </a:solidFill>
               </a:rPr>
-              <a:t>风格感知</a:t>
+              <a:t>L2增强指增</a:t>
             </a:r>
           </a:p>
           <a:p xmlns:a="http://schemas.openxmlformats.org/drawingml/2006/main">
@@ -5018,7 +5018,7 @@
                   <a:srgbClr val="000000"/>
                 </a:solidFill>
               </a:rPr>
-              <a:t>动态配权</a:t>
+              <a:t>AI筛选组合</a:t>
             </a:r>
           </a:p>
         </p:txBody>
@@ -5028,7 +5028,7 @@
           <p:cNvPr id="4" name="">
             <a:extLst xmlns:a="http://schemas.openxmlformats.org/drawingml/2006/main">
               <a:ext uri="{FF2B5EF4-FFF2-40B4-BE49-F238E27FC236}">
-                <a16:creationId xmlns:a16="http://schemas.microsoft.com/office/drawing/2014/main" id="{412830BB-22E0-4945-97FC-7D805BFC4268}"/>
+                <a16:creationId xmlns:a16="http://schemas.microsoft.com/office/drawing/2014/main" id="{CFF2825B-72AB-4A20-B5CA-20AC02DD71FA}"/>
               </a:ext>
             </a:extLst>
           </p:cNvPr>
@@ -5138,7 +5138,7 @@
                   <a:srgbClr val="000000"/>
                 </a:solidFill>
               </a:rPr>
-              <a:t>Q2利用AI模型识别风格状态，研究不同因子的条件权重。</a:t>
+              <a:t>Q2用机器学习检验因子增量，控制行业市值及动量反转的影响。</a:t>
             </a:r>
           </a:p>
           <a:p xmlns:a="http://schemas.openxmlformats.org/drawingml/2006/main">
@@ -5155,7 +5155,7 @@
                   <a:srgbClr val="000000"/>
                 </a:solidFill>
               </a:rPr>
-              <a:t>对比等权与ICIR配置，检验轮动收益是否来自风格暴露。</a:t>
+              <a:t>按ICIR和相关性筛选，加入风险模型、换手与容量约束。</a:t>
             </a:r>
           </a:p>
         </p:txBody>
@@ -5165,7 +5165,7 @@
           <p:cNvPr id="5" name="">
             <a:extLst xmlns:a="http://schemas.openxmlformats.org/drawingml/2006/main">
               <a:ext uri="{FF2B5EF4-FFF2-40B4-BE49-F238E27FC236}">
-                <a16:creationId xmlns:a16="http://schemas.microsoft.com/office/drawing/2014/main" id="{36A44848-BEC5-49D6-A23D-9585B964DD52}"/>
+                <a16:creationId xmlns:a16="http://schemas.microsoft.com/office/drawing/2014/main" id="{4A1971F5-8699-4503-AA56-24D0F23C2AF2}"/>
               </a:ext>
             </a:extLst>
           </p:cNvPr>
@@ -5275,7 +5275,7 @@
                   <a:srgbClr val="000000"/>
                 </a:solidFill>
               </a:rPr>
-              <a:t>成本与</a:t>
+              <a:t>状态感知配置</a:t>
             </a:r>
           </a:p>
           <a:p xmlns:a="http://schemas.openxmlformats.org/drawingml/2006/main">
@@ -5292,7 +5292,7 @@
                   <a:srgbClr val="000000"/>
                 </a:solidFill>
               </a:rPr>
-              <a:t>交易约束</a:t>
+              <a:t>指标与面板</a:t>
             </a:r>
           </a:p>
         </p:txBody>
@@ -5302,7 +5302,7 @@
           <p:cNvPr id="6" name="">
             <a:extLst xmlns:a="http://schemas.openxmlformats.org/drawingml/2006/main">
               <a:ext uri="{FF2B5EF4-FFF2-40B4-BE49-F238E27FC236}">
-                <a16:creationId xmlns:a16="http://schemas.microsoft.com/office/drawing/2014/main" id="{3E0F1C82-186D-4607-81FF-1CFAA4B5A7AE}"/>
+                <a16:creationId xmlns:a16="http://schemas.microsoft.com/office/drawing/2014/main" id="{76E41599-1E11-4ABF-B400-EAD77E14757F}"/>
               </a:ext>
             </a:extLst>
           </p:cNvPr>
@@ -5412,7 +5412,7 @@
                   <a:srgbClr val="000000"/>
                 </a:solidFill>
               </a:rPr>
-              <a:t>固定行业、个股及换手约束，检查AI信号的成本后收益。</a:t>
+              <a:t>Q1建立大小盘、行业轮动、ETF申赎及流动性压力指标库。</a:t>
             </a:r>
           </a:p>
           <a:p xmlns:a="http://schemas.openxmlformats.org/drawingml/2006/main">
@@ -5429,7 +5429,7 @@
                   <a:srgbClr val="000000"/>
                 </a:solidFill>
               </a:rPr>
-              <a:t>Q3将验证通过的组合纳入模拟盘，记录预测与执行偏差。</a:t>
+              <a:t>输出多窗口历史分位，检验对未来因子收益的预测力，区分输入与监控。</a:t>
             </a:r>
           </a:p>
         </p:txBody>
@@ -5439,7 +5439,7 @@
           <p:cNvPr id="7" name="">
             <a:extLst xmlns:a="http://schemas.openxmlformats.org/drawingml/2006/main">
               <a:ext uri="{FF2B5EF4-FFF2-40B4-BE49-F238E27FC236}">
-                <a16:creationId xmlns:a16="http://schemas.microsoft.com/office/drawing/2014/main" id="{A0CBCDC1-9BED-4A33-A253-D32E4CC027F1}"/>
+                <a16:creationId xmlns:a16="http://schemas.microsoft.com/office/drawing/2014/main" id="{9A886F42-FDBA-4EC1-9D4D-7FB2131FB289}"/>
               </a:ext>
             </a:extLst>
           </p:cNvPr>
@@ -5549,7 +5549,7 @@
                   <a:srgbClr val="000000"/>
                 </a:solidFill>
               </a:rPr>
-              <a:t>模型跟踪</a:t>
+              <a:t>状态感知配置</a:t>
             </a:r>
           </a:p>
           <a:p xmlns:a="http://schemas.openxmlformats.org/drawingml/2006/main">
@@ -5566,7 +5566,7 @@
                   <a:srgbClr val="000000"/>
                 </a:solidFill>
               </a:rPr>
-              <a:t>人工复核</a:t>
+              <a:t>AI动态权重</a:t>
             </a:r>
           </a:p>
         </p:txBody>
@@ -5576,7 +5576,7 @@
           <p:cNvPr id="8" name="">
             <a:extLst xmlns:a="http://schemas.openxmlformats.org/drawingml/2006/main">
               <a:ext uri="{FF2B5EF4-FFF2-40B4-BE49-F238E27FC236}">
-                <a16:creationId xmlns:a16="http://schemas.microsoft.com/office/drawing/2014/main" id="{7BF36310-04D6-451C-BD66-8BC608B4A989}"/>
+                <a16:creationId xmlns:a16="http://schemas.microsoft.com/office/drawing/2014/main" id="{A25EC021-2972-42AD-9151-8BA7D4541D97}"/>
               </a:ext>
             </a:extLst>
           </p:cNvPr>
@@ -5686,7 +5686,7 @@
                   <a:srgbClr val="000000"/>
                 </a:solidFill>
               </a:rPr>
-              <a:t>将风格和流动性指标接入监控面板，跟踪模型衰减。</a:t>
+              <a:t>Q2比较等权、固定ICIR、分位规则与AI状态门控配置。</a:t>
             </a:r>
           </a:p>
           <a:p xmlns:a="http://schemas.openxmlformats.org/drawingml/2006/main">
@@ -5703,7 +5703,7 @@
                   <a:srgbClr val="000000"/>
                 </a:solidFill>
               </a:rPr>
-              <a:t>Q3至Q4按月复盘超额与预警，人工决定保留或调整策略。</a:t>
+              <a:t>Q3做成本压力测试，Q4模拟盘复盘超额、回撤和换手，保留人工调整。</a:t>
             </a:r>
           </a:p>
         </p:txBody>
@@ -5711,7 +5711,7 @@
     </p:spTree>
     <p:extLst>
       <p:ext uri="{BB962C8B-B14F-4D97-AF65-F5344CB8AC3E}">
-        <p14:creationId xmlns:p14="http://schemas.microsoft.com/office/powerpoint/2010/main" val="1452474306"/>
+        <p14:creationId xmlns:p14="http://schemas.microsoft.com/office/powerpoint/2010/main" val="1489644861"/>
       </p:ext>
     </p:extLst>
   </p:cSld>
